--- a/K9-Case-Law-Officers-and-Handlers-Visual.pptx
+++ b/K9-Case-Law-Officers-and-Handlers-Visual.pptx
@@ -10335,7 +10335,7 @@
       </p:sp>
       <p:pic>
         <p:nvPicPr>
-          <p:cNvPr id="16" name="Picture 15" descr="place.jpg"/>
+          <p:cNvPr id="16" name="Picture 15" descr="SUV with luggage visible from outside"/>
           <p:cNvPicPr>
             <a:picLocks noChangeAspect="1"/>
           </p:cNvPicPr>
